--- a/media/resources/files/4-Amal_-_BagyttalganSandarKazynaIzdoo.pptx
+++ b/media/resources/files/4-Amal_-_BagyttalganSandarKazynaIzdoo.pptx
@@ -18148,7 +18148,7 @@
             </a:pPr>
             <a:r>
               <a:rPr lang="ru-RU" sz="3200" dirty="0"/>
-              <a:t>Турдуу пикирлер учун ыраазычылык билдиребиз.</a:t>
+              <a:t>Түрдүү пикирлер үчүн ыраазычылык билдиребиз.</a:t>
             </a:r>
           </a:p>
           <a:p>

--- a/media/resources/files/4-Amal_-_BagyttalganSandarKazynaIzdoo.pptx
+++ b/media/resources/files/4-Amal_-_BagyttalganSandarKazynaIzdoo.pptx
@@ -3807,7 +3807,7 @@
             </a:r>
             <a:r>
               <a:rPr lang="ky-KG" sz="2400" dirty="0"/>
-              <a:t>Унутуп калбаш учун</a:t>
+              <a:t>Унутуп калбаш үчүн</a:t>
             </a:r>
             <a:endParaRPr lang="en-US" sz="2400" dirty="0"/>
           </a:p>
